--- a/src/ppt-super/assets/tpl-13-pyramid/template.pptx
+++ b/src/ppt-super/assets/tpl-13-pyramid/template.pptx
@@ -3136,7 +3136,14 @@
           <a:bodyPr rtlCol="0" anchor="ctr"/>
           <a:lstStyle/>
           <a:p>
-            <a:pPr algn="ctr"/>
+            <a:pPr algn="ctr">
+              <a:spcBef>
+                <a:spcPts val="0"/>
+              </a:spcBef>
+              <a:spcAft>
+                <a:spcPts val="0"/>
+              </a:spcAft>
+            </a:pPr>
           </a:p>
         </p:txBody>
       </p:sp>
@@ -3166,14 +3173,21 @@
               <a:lnSpc>
                 <a:spcPct val="112000"/>
               </a:lnSpc>
+              <a:spcBef>
+                <a:spcPts val="0"/>
+              </a:spcBef>
+              <a:spcAft>
+                <a:spcPts val="0"/>
+              </a:spcAft>
             </a:pPr>
             <a:r>
-              <a:rPr sz="1400" b="1" i="0">
+              <a:rPr sz="1400" b="1" i="0" lang="zh-CN" altLang="zh-CN">
                 <a:solidFill>
                   <a:srgbClr val="FFFFFF"/>
                 </a:solidFill>
                 <a:latin typeface="Microsoft YaHei"/>
                 <a:ea typeface="Microsoft YaHei"/>
+                <a:cs typeface="Microsoft YaHei"/>
               </a:rPr>
               <a:t>国产生态</a:t>
             </a:r>
@@ -3206,14 +3220,21 @@
               <a:lnSpc>
                 <a:spcPct val="112000"/>
               </a:lnSpc>
+              <a:spcBef>
+                <a:spcPts val="0"/>
+              </a:spcBef>
+              <a:spcAft>
+                <a:spcPts val="0"/>
+              </a:spcAft>
             </a:pPr>
             <a:r>
-              <a:rPr sz="2200" b="1" i="0">
+              <a:rPr sz="2200" b="1" i="0" lang="zh-CN" altLang="zh-CN">
                 <a:solidFill>
                   <a:srgbClr val="B90A0A"/>
                 </a:solidFill>
                 <a:latin typeface="Microsoft YaHei"/>
                 <a:ea typeface="Microsoft YaHei"/>
+                <a:cs typeface="Microsoft YaHei"/>
               </a:rPr>
               <a:t>鲲鹏+昇腾自主可控: 芯-硬-软-应用-生态 5 层全栈, 国产化率 3 年提升 10 倍</a:t>
             </a:r>
@@ -3298,7 +3319,14 @@
           <a:bodyPr rtlCol="0" anchor="ctr"/>
           <a:lstStyle/>
           <a:p>
-            <a:pPr algn="ctr"/>
+            <a:pPr algn="ctr">
+              <a:spcBef>
+                <a:spcPts val="0"/>
+              </a:spcBef>
+              <a:spcAft>
+                <a:spcPts val="0"/>
+              </a:spcAft>
+            </a:pPr>
           </a:p>
         </p:txBody>
       </p:sp>
@@ -3342,7 +3370,14 @@
           <a:bodyPr rtlCol="0" anchor="ctr"/>
           <a:lstStyle/>
           <a:p>
-            <a:pPr algn="ctr"/>
+            <a:pPr algn="ctr">
+              <a:spcBef>
+                <a:spcPts val="0"/>
+              </a:spcBef>
+              <a:spcAft>
+                <a:spcPts val="0"/>
+              </a:spcAft>
+            </a:pPr>
           </a:p>
         </p:txBody>
       </p:sp>
@@ -3372,14 +3407,21 @@
               <a:lnSpc>
                 <a:spcPct val="112000"/>
               </a:lnSpc>
+              <a:spcBef>
+                <a:spcPts val="0"/>
+              </a:spcBef>
+              <a:spcAft>
+                <a:spcPts val="0"/>
+              </a:spcAft>
             </a:pPr>
             <a:r>
-              <a:rPr sz="1500" b="1" i="0">
+              <a:rPr sz="1500" b="1" i="0" lang="zh-CN" altLang="zh-CN">
                 <a:solidFill>
                   <a:srgbClr val="262626"/>
                 </a:solidFill>
                 <a:latin typeface="Microsoft YaHei"/>
                 <a:ea typeface="Microsoft YaHei"/>
+                <a:cs typeface="Microsoft YaHei"/>
               </a:rPr>
               <a:t>全栈自主可控分层体系</a:t>
             </a:r>
@@ -3426,7 +3468,14 @@
           <a:bodyPr rtlCol="0" anchor="ctr"/>
           <a:lstStyle/>
           <a:p>
-            <a:pPr algn="ctr"/>
+            <a:pPr algn="ctr">
+              <a:spcBef>
+                <a:spcPts val="0"/>
+              </a:spcBef>
+              <a:spcAft>
+                <a:spcPts val="0"/>
+              </a:spcAft>
+            </a:pPr>
           </a:p>
         </p:txBody>
       </p:sp>
@@ -3456,14 +3505,21 @@
               <a:lnSpc>
                 <a:spcPct val="112000"/>
               </a:lnSpc>
+              <a:spcBef>
+                <a:spcPts val="0"/>
+              </a:spcBef>
+              <a:spcAft>
+                <a:spcPts val="0"/>
+              </a:spcAft>
             </a:pPr>
             <a:r>
-              <a:rPr sz="1500" b="1" i="0">
+              <a:rPr sz="1500" b="1" i="0" lang="zh-CN" altLang="zh-CN">
                 <a:solidFill>
                   <a:srgbClr val="262626"/>
                 </a:solidFill>
                 <a:latin typeface="Microsoft YaHei"/>
                 <a:ea typeface="Microsoft YaHei"/>
+                <a:cs typeface="Microsoft YaHei"/>
               </a:rPr>
               <a:t>芯片基础 Chips</a:t>
             </a:r>
@@ -3532,14 +3588,21 @@
               <a:lnSpc>
                 <a:spcPct val="112000"/>
               </a:lnSpc>
+              <a:spcBef>
+                <a:spcPts val="0"/>
+              </a:spcBef>
+              <a:spcAft>
+                <a:spcPts val="0"/>
+              </a:spcAft>
             </a:pPr>
             <a:r>
-              <a:rPr sz="1100" b="0" i="0">
+              <a:rPr sz="1100" b="0" i="0" lang="zh-CN" altLang="zh-CN">
                 <a:solidFill>
                   <a:srgbClr val="595959"/>
                 </a:solidFill>
                 <a:latin typeface="Microsoft YaHei"/>
                 <a:ea typeface="Microsoft YaHei"/>
+                <a:cs typeface="Microsoft YaHei"/>
               </a:rPr>
               <a:t>鲲鹏 920 + 昇腾 910B 双引擎, 7nm 制程国产化, ARM v8 自研核</a:t>
             </a:r>
@@ -3586,7 +3649,14 @@
           <a:bodyPr rtlCol="0" anchor="ctr"/>
           <a:lstStyle/>
           <a:p>
-            <a:pPr algn="ctr"/>
+            <a:pPr algn="ctr">
+              <a:spcBef>
+                <a:spcPts val="0"/>
+              </a:spcBef>
+              <a:spcAft>
+                <a:spcPts val="0"/>
+              </a:spcAft>
+            </a:pPr>
           </a:p>
         </p:txBody>
       </p:sp>
@@ -3616,14 +3686,21 @@
               <a:lnSpc>
                 <a:spcPct val="112000"/>
               </a:lnSpc>
+              <a:spcBef>
+                <a:spcPts val="0"/>
+              </a:spcBef>
+              <a:spcAft>
+                <a:spcPts val="0"/>
+              </a:spcAft>
             </a:pPr>
             <a:r>
-              <a:rPr sz="1500" b="1" i="0">
+              <a:rPr sz="1500" b="1" i="0" lang="zh-CN" altLang="zh-CN">
                 <a:solidFill>
                   <a:srgbClr val="262626"/>
                 </a:solidFill>
                 <a:latin typeface="Microsoft YaHei"/>
                 <a:ea typeface="Microsoft YaHei"/>
+                <a:cs typeface="Microsoft YaHei"/>
               </a:rPr>
               <a:t>硬件平台 Hardware</a:t>
             </a:r>
@@ -3692,14 +3769,21 @@
               <a:lnSpc>
                 <a:spcPct val="112000"/>
               </a:lnSpc>
+              <a:spcBef>
+                <a:spcPts val="0"/>
+              </a:spcBef>
+              <a:spcAft>
+                <a:spcPts val="0"/>
+              </a:spcAft>
             </a:pPr>
             <a:r>
-              <a:rPr sz="1100" b="0" i="0">
+              <a:rPr sz="1100" b="0" i="0" lang="zh-CN" altLang="zh-CN">
                 <a:solidFill>
                   <a:srgbClr val="595959"/>
                 </a:solidFill>
                 <a:latin typeface="Microsoft YaHei"/>
                 <a:ea typeface="Microsoft YaHei"/>
+                <a:cs typeface="Microsoft YaHei"/>
               </a:rPr>
               <a:t>TaiShan 服务器 + Atlas 800/900 系列整机, 适配 ISV 6000+</a:t>
             </a:r>
@@ -3746,7 +3830,14 @@
           <a:bodyPr rtlCol="0" anchor="ctr"/>
           <a:lstStyle/>
           <a:p>
-            <a:pPr algn="ctr"/>
+            <a:pPr algn="ctr">
+              <a:spcBef>
+                <a:spcPts val="0"/>
+              </a:spcBef>
+              <a:spcAft>
+                <a:spcPts val="0"/>
+              </a:spcAft>
+            </a:pPr>
           </a:p>
         </p:txBody>
       </p:sp>
@@ -3776,14 +3867,21 @@
               <a:lnSpc>
                 <a:spcPct val="112000"/>
               </a:lnSpc>
+              <a:spcBef>
+                <a:spcPts val="0"/>
+              </a:spcBef>
+              <a:spcAft>
+                <a:spcPts val="0"/>
+              </a:spcAft>
             </a:pPr>
             <a:r>
-              <a:rPr sz="1500" b="1" i="0">
+              <a:rPr sz="1500" b="1" i="0" lang="zh-CN" altLang="zh-CN">
                 <a:solidFill>
                   <a:srgbClr val="FFFFFF"/>
                 </a:solidFill>
                 <a:latin typeface="Microsoft YaHei"/>
                 <a:ea typeface="Microsoft YaHei"/>
+                <a:cs typeface="Microsoft YaHei"/>
               </a:rPr>
               <a:t>软件栈 Software</a:t>
             </a:r>
@@ -3852,14 +3950,21 @@
               <a:lnSpc>
                 <a:spcPct val="112000"/>
               </a:lnSpc>
+              <a:spcBef>
+                <a:spcPts val="0"/>
+              </a:spcBef>
+              <a:spcAft>
+                <a:spcPts val="0"/>
+              </a:spcAft>
             </a:pPr>
             <a:r>
-              <a:rPr sz="1100" b="0" i="0">
+              <a:rPr sz="1100" b="0" i="0" lang="zh-CN" altLang="zh-CN">
                 <a:solidFill>
                   <a:srgbClr val="595959"/>
                 </a:solidFill>
                 <a:latin typeface="Microsoft YaHei"/>
                 <a:ea typeface="Microsoft YaHei"/>
+                <a:cs typeface="Microsoft YaHei"/>
               </a:rPr>
               <a:t>openEuler / openGauss / MindSpore 全栈开源, 社区开发者 380 万</a:t>
             </a:r>
@@ -3906,7 +4011,14 @@
           <a:bodyPr rtlCol="0" anchor="ctr"/>
           <a:lstStyle/>
           <a:p>
-            <a:pPr algn="ctr"/>
+            <a:pPr algn="ctr">
+              <a:spcBef>
+                <a:spcPts val="0"/>
+              </a:spcBef>
+              <a:spcAft>
+                <a:spcPts val="0"/>
+              </a:spcAft>
+            </a:pPr>
           </a:p>
         </p:txBody>
       </p:sp>
@@ -3936,14 +4048,21 @@
               <a:lnSpc>
                 <a:spcPct val="112000"/>
               </a:lnSpc>
+              <a:spcBef>
+                <a:spcPts val="0"/>
+              </a:spcBef>
+              <a:spcAft>
+                <a:spcPts val="0"/>
+              </a:spcAft>
             </a:pPr>
             <a:r>
-              <a:rPr sz="1500" b="1" i="0">
+              <a:rPr sz="1500" b="1" i="0" lang="zh-CN" altLang="zh-CN">
                 <a:solidFill>
                   <a:srgbClr val="FFFFFF"/>
                 </a:solidFill>
                 <a:latin typeface="Microsoft YaHei"/>
                 <a:ea typeface="Microsoft YaHei"/>
+                <a:cs typeface="Microsoft YaHei"/>
               </a:rPr>
               <a:t>应用层 Applications</a:t>
             </a:r>
@@ -4012,14 +4131,21 @@
               <a:lnSpc>
                 <a:spcPct val="112000"/>
               </a:lnSpc>
+              <a:spcBef>
+                <a:spcPts val="0"/>
+              </a:spcBef>
+              <a:spcAft>
+                <a:spcPts val="0"/>
+              </a:spcAft>
             </a:pPr>
             <a:r>
-              <a:rPr sz="1100" b="0" i="0">
+              <a:rPr sz="1100" b="0" i="0" lang="zh-CN" altLang="zh-CN">
                 <a:solidFill>
                   <a:srgbClr val="595959"/>
                 </a:solidFill>
                 <a:latin typeface="Microsoft YaHei"/>
                 <a:ea typeface="Microsoft YaHei"/>
+                <a:cs typeface="Microsoft YaHei"/>
               </a:rPr>
               <a:t>政企 ERP+OA 全栈替代, 行业大模型 MindIE 已落地 50+ 行业</a:t>
             </a:r>
@@ -4066,7 +4192,14 @@
           <a:bodyPr rtlCol="0" anchor="ctr"/>
           <a:lstStyle/>
           <a:p>
-            <a:pPr algn="ctr"/>
+            <a:pPr algn="ctr">
+              <a:spcBef>
+                <a:spcPts val="0"/>
+              </a:spcBef>
+              <a:spcAft>
+                <a:spcPts val="0"/>
+              </a:spcAft>
+            </a:pPr>
           </a:p>
         </p:txBody>
       </p:sp>
@@ -4096,14 +4229,21 @@
               <a:lnSpc>
                 <a:spcPct val="112000"/>
               </a:lnSpc>
+              <a:spcBef>
+                <a:spcPts val="0"/>
+              </a:spcBef>
+              <a:spcAft>
+                <a:spcPts val="0"/>
+              </a:spcAft>
             </a:pPr>
             <a:r>
-              <a:rPr sz="1500" b="1" i="0">
+              <a:rPr sz="1500" b="1" i="0" lang="zh-CN" altLang="zh-CN">
                 <a:solidFill>
                   <a:srgbClr val="FFFFFF"/>
                 </a:solidFill>
                 <a:latin typeface="Microsoft YaHei"/>
                 <a:ea typeface="Microsoft YaHei"/>
+                <a:cs typeface="Microsoft YaHei"/>
               </a:rPr>
               <a:t>生态共赢 Ecosystem</a:t>
             </a:r>
@@ -4154,8 +4294,8 @@
         </p:nvSpPr>
         <p:spPr>
           <a:xfrm>
-            <a:off x="5270500" y="1384300"/>
-            <a:ext cx="1460500" cy="825500"/>
+            <a:off x="5253037" y="1384300"/>
+            <a:ext cx="1495425" cy="825500"/>
           </a:xfrm>
           <a:prstGeom prst="rect">
             <a:avLst/>
@@ -4172,14 +4312,21 @@
               <a:lnSpc>
                 <a:spcPct val="112000"/>
               </a:lnSpc>
+              <a:spcBef>
+                <a:spcPts val="0"/>
+              </a:spcBef>
+              <a:spcAft>
+                <a:spcPts val="0"/>
+              </a:spcAft>
             </a:pPr>
             <a:r>
-              <a:rPr sz="1100" b="0" i="0">
+              <a:rPr sz="1100" b="0" i="0" lang="zh-CN" altLang="zh-CN">
                 <a:solidFill>
                   <a:srgbClr val="595959"/>
                 </a:solidFill>
                 <a:latin typeface="Microsoft YaHei"/>
                 <a:ea typeface="Microsoft YaHei"/>
+                <a:cs typeface="Microsoft YaHei"/>
               </a:rPr>
               <a:t>鲲鹏展翅伙伴 5000+, 认证解决方案 1.7 万个, 出口管制无忧</a:t>
             </a:r>
@@ -4250,14 +4397,21 @@
               <a:lnSpc>
                 <a:spcPct val="112000"/>
               </a:lnSpc>
+              <a:spcBef>
+                <a:spcPts val="0"/>
+              </a:spcBef>
+              <a:spcAft>
+                <a:spcPts val="0"/>
+              </a:spcAft>
             </a:pPr>
             <a:r>
-              <a:rPr sz="1200" b="1" i="0">
+              <a:rPr sz="1200" b="1" i="0" lang="zh-CN" altLang="zh-CN">
                 <a:solidFill>
                   <a:srgbClr val="B90A0A"/>
                 </a:solidFill>
                 <a:latin typeface="Microsoft YaHei"/>
                 <a:ea typeface="Microsoft YaHei"/>
+                <a:cs typeface="Microsoft YaHei"/>
               </a:rPr>
               <a:t>自主可控程度</a:t>
             </a:r>
@@ -4306,7 +4460,14 @@
           <a:bodyPr rtlCol="0" anchor="ctr"/>
           <a:lstStyle/>
           <a:p>
-            <a:pPr algn="ctr"/>
+            <a:pPr algn="ctr">
+              <a:spcBef>
+                <a:spcPts val="0"/>
+              </a:spcBef>
+              <a:spcAft>
+                <a:spcPts val="0"/>
+              </a:spcAft>
+            </a:pPr>
           </a:p>
         </p:txBody>
       </p:sp>
@@ -4350,7 +4511,14 @@
           <a:bodyPr rtlCol="0" anchor="ctr"/>
           <a:lstStyle/>
           <a:p>
-            <a:pPr algn="ctr"/>
+            <a:pPr algn="ctr">
+              <a:spcBef>
+                <a:spcPts val="0"/>
+              </a:spcBef>
+              <a:spcAft>
+                <a:spcPts val="0"/>
+              </a:spcAft>
+            </a:pPr>
           </a:p>
         </p:txBody>
       </p:sp>
@@ -4394,7 +4562,14 @@
           <a:bodyPr rtlCol="0" anchor="ctr"/>
           <a:lstStyle/>
           <a:p>
-            <a:pPr algn="ctr"/>
+            <a:pPr algn="ctr">
+              <a:spcBef>
+                <a:spcPts val="0"/>
+              </a:spcBef>
+              <a:spcAft>
+                <a:spcPts val="0"/>
+              </a:spcAft>
+            </a:pPr>
           </a:p>
         </p:txBody>
       </p:sp>
@@ -4424,14 +4599,21 @@
               <a:lnSpc>
                 <a:spcPct val="112000"/>
               </a:lnSpc>
+              <a:spcBef>
+                <a:spcPts val="0"/>
+              </a:spcBef>
+              <a:spcAft>
+                <a:spcPts val="0"/>
+              </a:spcAft>
             </a:pPr>
             <a:r>
-              <a:rPr sz="1500" b="1" i="0">
+              <a:rPr sz="1500" b="1" i="0" lang="zh-CN" altLang="zh-CN">
                 <a:solidFill>
                   <a:srgbClr val="262626"/>
                 </a:solidFill>
                 <a:latin typeface="Microsoft YaHei"/>
                 <a:ea typeface="Microsoft YaHei"/>
+                <a:cs typeface="Microsoft YaHei"/>
               </a:rPr>
               <a:t>分级解读</a:t>
             </a:r>
@@ -4464,14 +4646,21 @@
               <a:lnSpc>
                 <a:spcPct val="130000"/>
               </a:lnSpc>
+              <a:spcBef>
+                <a:spcPts val="0"/>
+              </a:spcBef>
+              <a:spcAft>
+                <a:spcPts val="0"/>
+              </a:spcAft>
             </a:pPr>
             <a:r>
-              <a:rPr sz="1200" b="0" i="0">
+              <a:rPr sz="1200" b="0" i="0" lang="zh-CN" altLang="zh-CN">
                 <a:solidFill>
                   <a:srgbClr val="262626"/>
                 </a:solidFill>
                 <a:latin typeface="Microsoft YaHei"/>
                 <a:ea typeface="Microsoft YaHei"/>
+                <a:cs typeface="Microsoft YaHei"/>
               </a:rPr>
               <a:t>全栈体系遵循自底向上的建设逻辑: 芯片与硬件双层率先夯实, 算力国产化率从 5% 提升至 50%; MindSpore 与昇腾 910B 深度协同调优, 训练效率提升 1.8 倍。应用侧以政企核心系统全栈替代为牵引, 已覆盖 18 大基建行业, 行业大模型落地超过 50 个场景; 生态侧 ISV 数量年增 60%, 解决方案认证周期缩短至 2 周, 并主导欧拉、昇思等 12 项国家标准。全栈漏洞响应小于 24 小时, 已通过等保四级认证。下层规模决定上层繁荣, 五层飞轮已形成正向循环, 体系护城河持续加固。</a:t>
             </a:r>
@@ -4504,14 +4693,21 @@
               <a:lnSpc>
                 <a:spcPct val="112000"/>
               </a:lnSpc>
+              <a:spcBef>
+                <a:spcPts val="0"/>
+              </a:spcBef>
+              <a:spcAft>
+                <a:spcPts val="0"/>
+              </a:spcAft>
             </a:pPr>
             <a:r>
-              <a:rPr sz="1050" b="1" i="0">
+              <a:rPr sz="1050" b="1" i="0" lang="zh-CN" altLang="zh-CN">
                 <a:solidFill>
                   <a:srgbClr val="595959"/>
                 </a:solidFill>
                 <a:latin typeface="Microsoft YaHei"/>
                 <a:ea typeface="Microsoft YaHei"/>
+                <a:cs typeface="Microsoft YaHei"/>
               </a:rPr>
               <a:t>国产化率演进 (%)</a:t>
             </a:r>
@@ -4594,7 +4790,14 @@
           <a:bodyPr rtlCol="0" anchor="ctr"/>
           <a:lstStyle/>
           <a:p>
-            <a:pPr algn="ctr"/>
+            <a:pPr algn="ctr">
+              <a:spcBef>
+                <a:spcPts val="0"/>
+              </a:spcBef>
+              <a:spcAft>
+                <a:spcPts val="0"/>
+              </a:spcAft>
+            </a:pPr>
           </a:p>
         </p:txBody>
       </p:sp>
@@ -4606,8 +4809,8 @@
         </p:nvSpPr>
         <p:spPr>
           <a:xfrm>
-            <a:off x="7292975" y="4930648"/>
-            <a:ext cx="1079500" cy="139700"/>
+            <a:off x="7292975" y="4910264"/>
+            <a:ext cx="1079500" cy="180467"/>
           </a:xfrm>
           <a:prstGeom prst="rect">
             <a:avLst/>
@@ -4624,14 +4827,21 @@
               <a:lnSpc>
                 <a:spcPct val="112000"/>
               </a:lnSpc>
+              <a:spcBef>
+                <a:spcPts val="0"/>
+              </a:spcBef>
+              <a:spcAft>
+                <a:spcPts val="0"/>
+              </a:spcAft>
             </a:pPr>
             <a:r>
-              <a:rPr sz="1000" b="1" i="0">
+              <a:rPr sz="1000" b="1" i="0" lang="zh-CN" altLang="zh-CN">
                 <a:solidFill>
                   <a:srgbClr val="262626"/>
                 </a:solidFill>
                 <a:latin typeface="Microsoft YaHei"/>
                 <a:ea typeface="Microsoft YaHei"/>
+                <a:cs typeface="Microsoft YaHei"/>
               </a:rPr>
               <a:t>5%</a:t>
             </a:r>
@@ -4664,14 +4874,21 @@
               <a:lnSpc>
                 <a:spcPct val="112000"/>
               </a:lnSpc>
+              <a:spcBef>
+                <a:spcPts val="0"/>
+              </a:spcBef>
+              <a:spcAft>
+                <a:spcPts val="0"/>
+              </a:spcAft>
             </a:pPr>
             <a:r>
-              <a:rPr sz="950" b="0" i="0">
+              <a:rPr sz="950" b="0" i="0" lang="zh-CN" altLang="zh-CN">
                 <a:solidFill>
                   <a:srgbClr val="595959"/>
                 </a:solidFill>
                 <a:latin typeface="Microsoft YaHei"/>
                 <a:ea typeface="Microsoft YaHei"/>
+                <a:cs typeface="Microsoft YaHei"/>
               </a:rPr>
               <a:t>2022</a:t>
             </a:r>
@@ -4718,7 +4935,14 @@
           <a:bodyPr rtlCol="0" anchor="ctr"/>
           <a:lstStyle/>
           <a:p>
-            <a:pPr algn="ctr"/>
+            <a:pPr algn="ctr">
+              <a:spcBef>
+                <a:spcPts val="0"/>
+              </a:spcBef>
+              <a:spcAft>
+                <a:spcPts val="0"/>
+              </a:spcAft>
+            </a:pPr>
           </a:p>
         </p:txBody>
       </p:sp>
@@ -4730,8 +4954,8 @@
         </p:nvSpPr>
         <p:spPr>
           <a:xfrm>
-            <a:off x="8372475" y="4682744"/>
-            <a:ext cx="1079500" cy="139700"/>
+            <a:off x="8372475" y="4662360"/>
+            <a:ext cx="1079500" cy="180467"/>
           </a:xfrm>
           <a:prstGeom prst="rect">
             <a:avLst/>
@@ -4748,14 +4972,21 @@
               <a:lnSpc>
                 <a:spcPct val="112000"/>
               </a:lnSpc>
+              <a:spcBef>
+                <a:spcPts val="0"/>
+              </a:spcBef>
+              <a:spcAft>
+                <a:spcPts val="0"/>
+              </a:spcAft>
             </a:pPr>
             <a:r>
-              <a:rPr sz="1000" b="1" i="0">
+              <a:rPr sz="1000" b="1" i="0" lang="zh-CN" altLang="zh-CN">
                 <a:solidFill>
                   <a:srgbClr val="262626"/>
                 </a:solidFill>
                 <a:latin typeface="Microsoft YaHei"/>
                 <a:ea typeface="Microsoft YaHei"/>
+                <a:cs typeface="Microsoft YaHei"/>
               </a:rPr>
               <a:t>15%</a:t>
             </a:r>
@@ -4788,14 +5019,21 @@
               <a:lnSpc>
                 <a:spcPct val="112000"/>
               </a:lnSpc>
+              <a:spcBef>
+                <a:spcPts val="0"/>
+              </a:spcBef>
+              <a:spcAft>
+                <a:spcPts val="0"/>
+              </a:spcAft>
             </a:pPr>
             <a:r>
-              <a:rPr sz="950" b="0" i="0">
+              <a:rPr sz="950" b="0" i="0" lang="zh-CN" altLang="zh-CN">
                 <a:solidFill>
                   <a:srgbClr val="595959"/>
                 </a:solidFill>
                 <a:latin typeface="Microsoft YaHei"/>
                 <a:ea typeface="Microsoft YaHei"/>
+                <a:cs typeface="Microsoft YaHei"/>
               </a:rPr>
               <a:t>2023</a:t>
             </a:r>
@@ -4842,7 +5080,14 @@
           <a:bodyPr rtlCol="0" anchor="ctr"/>
           <a:lstStyle/>
           <a:p>
-            <a:pPr algn="ctr"/>
+            <a:pPr algn="ctr">
+              <a:spcBef>
+                <a:spcPts val="0"/>
+              </a:spcBef>
+              <a:spcAft>
+                <a:spcPts val="0"/>
+              </a:spcAft>
+            </a:pPr>
           </a:p>
         </p:txBody>
       </p:sp>
@@ -4854,8 +5099,8 @@
         </p:nvSpPr>
         <p:spPr>
           <a:xfrm>
-            <a:off x="9451975" y="4310888"/>
-            <a:ext cx="1079500" cy="139700"/>
+            <a:off x="9451975" y="4290504"/>
+            <a:ext cx="1079500" cy="180467"/>
           </a:xfrm>
           <a:prstGeom prst="rect">
             <a:avLst/>
@@ -4872,14 +5117,21 @@
               <a:lnSpc>
                 <a:spcPct val="112000"/>
               </a:lnSpc>
+              <a:spcBef>
+                <a:spcPts val="0"/>
+              </a:spcBef>
+              <a:spcAft>
+                <a:spcPts val="0"/>
+              </a:spcAft>
             </a:pPr>
             <a:r>
-              <a:rPr sz="1000" b="1" i="0">
+              <a:rPr sz="1000" b="1" i="0" lang="zh-CN" altLang="zh-CN">
                 <a:solidFill>
                   <a:srgbClr val="262626"/>
                 </a:solidFill>
                 <a:latin typeface="Microsoft YaHei"/>
                 <a:ea typeface="Microsoft YaHei"/>
+                <a:cs typeface="Microsoft YaHei"/>
               </a:rPr>
               <a:t>30%</a:t>
             </a:r>
@@ -4912,14 +5164,21 @@
               <a:lnSpc>
                 <a:spcPct val="112000"/>
               </a:lnSpc>
+              <a:spcBef>
+                <a:spcPts val="0"/>
+              </a:spcBef>
+              <a:spcAft>
+                <a:spcPts val="0"/>
+              </a:spcAft>
             </a:pPr>
             <a:r>
-              <a:rPr sz="950" b="0" i="0">
+              <a:rPr sz="950" b="0" i="0" lang="zh-CN" altLang="zh-CN">
                 <a:solidFill>
                   <a:srgbClr val="595959"/>
                 </a:solidFill>
                 <a:latin typeface="Microsoft YaHei"/>
                 <a:ea typeface="Microsoft YaHei"/>
+                <a:cs typeface="Microsoft YaHei"/>
               </a:rPr>
               <a:t>2024</a:t>
             </a:r>
@@ -4966,7 +5225,14 @@
           <a:bodyPr rtlCol="0" anchor="ctr"/>
           <a:lstStyle/>
           <a:p>
-            <a:pPr algn="ctr"/>
+            <a:pPr algn="ctr">
+              <a:spcBef>
+                <a:spcPts val="0"/>
+              </a:spcBef>
+              <a:spcAft>
+                <a:spcPts val="0"/>
+              </a:spcAft>
+            </a:pPr>
           </a:p>
         </p:txBody>
       </p:sp>
@@ -4978,8 +5244,8 @@
         </p:nvSpPr>
         <p:spPr>
           <a:xfrm>
-            <a:off x="10531475" y="3815079"/>
-            <a:ext cx="1079500" cy="139700"/>
+            <a:off x="10531475" y="3794695"/>
+            <a:ext cx="1079500" cy="180467"/>
           </a:xfrm>
           <a:prstGeom prst="rect">
             <a:avLst/>
@@ -4996,14 +5262,21 @@
               <a:lnSpc>
                 <a:spcPct val="112000"/>
               </a:lnSpc>
+              <a:spcBef>
+                <a:spcPts val="0"/>
+              </a:spcBef>
+              <a:spcAft>
+                <a:spcPts val="0"/>
+              </a:spcAft>
             </a:pPr>
             <a:r>
-              <a:rPr sz="1000" b="1" i="0">
+              <a:rPr sz="1000" b="1" i="0" lang="zh-CN" altLang="zh-CN">
                 <a:solidFill>
                   <a:srgbClr val="262626"/>
                 </a:solidFill>
                 <a:latin typeface="Microsoft YaHei"/>
                 <a:ea typeface="Microsoft YaHei"/>
+                <a:cs typeface="Microsoft YaHei"/>
               </a:rPr>
               <a:t>50%</a:t>
             </a:r>
@@ -5036,14 +5309,21 @@
               <a:lnSpc>
                 <a:spcPct val="112000"/>
               </a:lnSpc>
+              <a:spcBef>
+                <a:spcPts val="0"/>
+              </a:spcBef>
+              <a:spcAft>
+                <a:spcPts val="0"/>
+              </a:spcAft>
             </a:pPr>
             <a:r>
-              <a:rPr sz="950" b="0" i="0">
+              <a:rPr sz="950" b="0" i="0" lang="zh-CN" altLang="zh-CN">
                 <a:solidFill>
                   <a:srgbClr val="595959"/>
                 </a:solidFill>
                 <a:latin typeface="Microsoft YaHei"/>
                 <a:ea typeface="Microsoft YaHei"/>
+                <a:cs typeface="Microsoft YaHei"/>
               </a:rPr>
               <a:t>2025</a:t>
             </a:r>
@@ -5199,7 +5479,14 @@
           <a:bodyPr rtlCol="0" anchor="ctr"/>
           <a:lstStyle/>
           <a:p>
-            <a:pPr algn="ctr"/>
+            <a:pPr algn="ctr">
+              <a:spcBef>
+                <a:spcPts val="0"/>
+              </a:spcBef>
+              <a:spcAft>
+                <a:spcPts val="0"/>
+              </a:spcAft>
+            </a:pPr>
           </a:p>
         </p:txBody>
       </p:sp>
@@ -5229,14 +5516,21 @@
               <a:lnSpc>
                 <a:spcPct val="112000"/>
               </a:lnSpc>
+              <a:spcBef>
+                <a:spcPts val="0"/>
+              </a:spcBef>
+              <a:spcAft>
+                <a:spcPts val="0"/>
+              </a:spcAft>
             </a:pPr>
             <a:r>
-              <a:rPr sz="1400" b="1" i="0">
+              <a:rPr sz="1400" b="1" i="0" lang="zh-CN" altLang="zh-CN">
                 <a:solidFill>
                   <a:srgbClr val="262626"/>
                 </a:solidFill>
                 <a:latin typeface="Microsoft YaHei"/>
                 <a:ea typeface="Microsoft YaHei"/>
+                <a:cs typeface="Microsoft YaHei"/>
               </a:rPr>
               <a:t>国产化率 3 年提升 ×10, 2025 达 50%</a:t>
             </a:r>
